--- a/misc/Menu 24 by 36 on 12-12-24/2_DaBeast Services Menu.pptx
+++ b/misc/Menu 24 by 36 on 12-12-24/2_DaBeast Services Menu.pptx
@@ -267,7 +267,7 @@
       <p15:sldGuideLst xmlns:p15="http://schemas.microsoft.com/office/powerpoint/2012/main"/>
     </p:ext>
     <p:ext uri="GoogleSlidesCustomDataVersion2">
-      <go:slidesCustomData xmlns="" xmlns:mc="http://schemas.openxmlformats.org/markup-compatibility/2006" xmlns:mv="urn:schemas-microsoft-com:mac:vml" xmlns:c="http://schemas.openxmlformats.org/drawingml/2006/chart" xmlns:dgm="http://schemas.openxmlformats.org/drawingml/2006/diagram" xmlns:o="urn:schemas-microsoft-com:office:office" xmlns:v="urn:schemas-microsoft-com:vml" xmlns:pvml="urn:schemas-microsoft-com:office:powerpoint" xmlns:com="http://schemas.openxmlformats.org/drawingml/2006/compatibility" xmlns:p14="http://schemas.microsoft.com/office/powerpoint/2010/main" xmlns:p15="http://schemas.microsoft.com/office/powerpoint/2012/main" xmlns:ahyp="http://schemas.microsoft.com/office/drawing/2018/hyperlinkcolor" xmlns:go="http://customooxmlschemas.google.com/" r:id="rId14" roundtripDataSignature="AMtx7mhAGQ6bx072VdG0iiEFAjy+qtJDIw=="/>
+      <go:slidesCustomData xmlns:go="http://customooxmlschemas.google.com/" xmlns:ahyp="http://schemas.microsoft.com/office/drawing/2018/hyperlinkcolor" xmlns:p15="http://schemas.microsoft.com/office/powerpoint/2012/main" xmlns:p14="http://schemas.microsoft.com/office/powerpoint/2010/main" xmlns:com="http://schemas.openxmlformats.org/drawingml/2006/compatibility" xmlns:pvml="urn:schemas-microsoft-com:office:powerpoint" xmlns:v="urn:schemas-microsoft-com:vml" xmlns:o="urn:schemas-microsoft-com:office:office" xmlns:dgm="http://schemas.openxmlformats.org/drawingml/2006/diagram" xmlns:c="http://schemas.openxmlformats.org/drawingml/2006/chart" xmlns:mv="urn:schemas-microsoft-com:mac:vml" xmlns:mc="http://schemas.openxmlformats.org/markup-compatibility/2006" xmlns="" r:id="rId14" roundtripDataSignature="AMtx7mhAGQ6bx072VdG0iiEFAjy+qtJDIw=="/>
     </p:ext>
   </p:extLst>
 </p:presentation>
@@ -12735,101 +12735,6 @@
           </a:p>
         </p:txBody>
       </p:sp>
-      <p:pic>
-        <p:nvPicPr>
-          <p:cNvPr id="98" name="Google Shape;98;p1" descr="A qr code with black squares&#10;&#10;Description automatically generated"/>
-          <p:cNvPicPr preferRelativeResize="0"/>
-          <p:nvPr/>
-        </p:nvPicPr>
-        <p:blipFill rotWithShape="1">
-          <a:blip r:embed="rId4">
-            <a:alphaModFix/>
-          </a:blip>
-          <a:srcRect/>
-          <a:stretch/>
-        </p:blipFill>
-        <p:spPr>
-          <a:xfrm>
-            <a:off x="4054643" y="28052743"/>
-            <a:ext cx="2560503" cy="2560503"/>
-          </a:xfrm>
-          <a:prstGeom prst="rect">
-            <a:avLst/>
-          </a:prstGeom>
-          <a:noFill/>
-          <a:ln>
-            <a:noFill/>
-          </a:ln>
-        </p:spPr>
-      </p:pic>
-      <p:sp>
-        <p:nvSpPr>
-          <p:cNvPr id="99" name="Google Shape;99;p1"/>
-          <p:cNvSpPr txBox="1"/>
-          <p:nvPr/>
-        </p:nvSpPr>
-        <p:spPr>
-          <a:xfrm>
-            <a:off x="595237" y="30843472"/>
-            <a:ext cx="9479100" cy="1101900"/>
-          </a:xfrm>
-          <a:prstGeom prst="rect">
-            <a:avLst/>
-          </a:prstGeom>
-          <a:noFill/>
-          <a:ln>
-            <a:noFill/>
-          </a:ln>
-        </p:spPr>
-        <p:txBody>
-          <a:bodyPr spcFirstLastPara="1" wrap="square" lIns="298525" tIns="149225" rIns="298525" bIns="149225" anchor="t" anchorCtr="0">
-            <a:spAutoFit/>
-          </a:bodyPr>
-          <a:lstStyle/>
-          <a:p>
-            <a:pPr marL="0" marR="0" lvl="0" indent="0" algn="ctr" rtl="0">
-              <a:spcBef>
-                <a:spcPts val="0"/>
-              </a:spcBef>
-              <a:spcAft>
-                <a:spcPts val="0"/>
-              </a:spcAft>
-              <a:buNone/>
-            </a:pPr>
-            <a:r>
-              <a:rPr lang="en-US" sz="5200" i="1" dirty="0">
-                <a:solidFill>
-                  <a:srgbClr val="8CD872"/>
-                </a:solidFill>
-                <a:uFill>
-                  <a:noFill/>
-                </a:uFill>
-                <a:latin typeface="Arial"/>
-                <a:ea typeface="Arial"/>
-                <a:cs typeface="Arial"/>
-                <a:sym typeface="Arial"/>
-                <a:hlinkClick r:id="rId5">
-                  <a:extLst>
-                    <a:ext uri="{A12FA001-AC4F-418D-AE19-62706E023703}">
-                      <ahyp:hlinkClr xmlns:ahyp="http://schemas.microsoft.com/office/drawing/2018/hyperlinkcolor" val="tx"/>
-                    </a:ext>
-                  </a:extLst>
-                </a:hlinkClick>
-              </a:rPr>
-              <a:t>https://dabeastservices.com</a:t>
-            </a:r>
-            <a:endParaRPr sz="5200" i="1" dirty="0">
-              <a:solidFill>
-                <a:srgbClr val="8CD872"/>
-              </a:solidFill>
-              <a:latin typeface="Arial"/>
-              <a:ea typeface="Arial"/>
-              <a:cs typeface="Arial"/>
-              <a:sym typeface="Arial"/>
-            </a:endParaRPr>
-          </a:p>
-        </p:txBody>
-      </p:sp>
       <p:sp>
         <p:nvSpPr>
           <p:cNvPr id="100" name="Google Shape;100;p1"/>
@@ -13998,6 +13903,198 @@
           </p:sp>
         </p:grpSp>
       </p:grpSp>
+      <p:pic>
+        <p:nvPicPr>
+          <p:cNvPr id="2" name="Google Shape;100;p1" descr="A qr code with black squares&#10;&#10;Description automatically generated">
+            <a:extLst>
+              <a:ext uri="{FF2B5EF4-FFF2-40B4-BE49-F238E27FC236}">
+                <a16:creationId xmlns:a16="http://schemas.microsoft.com/office/drawing/2014/main" id="{5CE89A74-C110-7848-CF26-9B890AC27B4F}"/>
+              </a:ext>
+            </a:extLst>
+          </p:cNvPr>
+          <p:cNvPicPr preferRelativeResize="0"/>
+          <p:nvPr/>
+        </p:nvPicPr>
+        <p:blipFill rotWithShape="1">
+          <a:blip r:embed="rId4">
+            <a:alphaModFix/>
+          </a:blip>
+          <a:srcRect/>
+          <a:stretch/>
+        </p:blipFill>
+        <p:spPr>
+          <a:xfrm>
+            <a:off x="7126864" y="28210463"/>
+            <a:ext cx="2750509" cy="2750509"/>
+          </a:xfrm>
+          <a:prstGeom prst="rect">
+            <a:avLst/>
+          </a:prstGeom>
+          <a:noFill/>
+          <a:ln>
+            <a:noFill/>
+          </a:ln>
+        </p:spPr>
+      </p:pic>
+      <p:sp>
+        <p:nvSpPr>
+          <p:cNvPr id="3" name="Google Shape;101;p1">
+            <a:extLst>
+              <a:ext uri="{FF2B5EF4-FFF2-40B4-BE49-F238E27FC236}">
+                <a16:creationId xmlns:a16="http://schemas.microsoft.com/office/drawing/2014/main" id="{0DDAC87F-8BDB-EC38-5F2C-F58C05D5290C}"/>
+              </a:ext>
+            </a:extLst>
+          </p:cNvPr>
+          <p:cNvSpPr txBox="1"/>
+          <p:nvPr/>
+        </p:nvSpPr>
+        <p:spPr>
+          <a:xfrm>
+            <a:off x="480637" y="31232455"/>
+            <a:ext cx="9708600" cy="1101900"/>
+          </a:xfrm>
+          <a:prstGeom prst="rect">
+            <a:avLst/>
+          </a:prstGeom>
+          <a:noFill/>
+          <a:ln>
+            <a:noFill/>
+          </a:ln>
+        </p:spPr>
+        <p:txBody>
+          <a:bodyPr spcFirstLastPara="1" wrap="square" lIns="298525" tIns="149225" rIns="298525" bIns="149225" anchor="t" anchorCtr="0">
+            <a:spAutoFit/>
+          </a:bodyPr>
+          <a:lstStyle/>
+          <a:p>
+            <a:pPr marL="0" marR="0" lvl="0" indent="0" algn="ctr" rtl="0">
+              <a:spcBef>
+                <a:spcPts val="0"/>
+              </a:spcBef>
+              <a:spcAft>
+                <a:spcPts val="0"/>
+              </a:spcAft>
+              <a:buNone/>
+            </a:pPr>
+            <a:r>
+              <a:rPr lang="en-US" sz="5200" i="1" dirty="0">
+                <a:solidFill>
+                  <a:srgbClr val="8CD872"/>
+                </a:solidFill>
+                <a:uFill>
+                  <a:noFill/>
+                </a:uFill>
+                <a:latin typeface="Arial"/>
+                <a:ea typeface="Arial"/>
+                <a:cs typeface="Arial"/>
+                <a:sym typeface="Arial"/>
+                <a:hlinkClick r:id="rId5">
+                  <a:extLst>
+                    <a:ext uri="{A12FA001-AC4F-418D-AE19-62706E023703}">
+                      <ahyp:hlinkClr xmlns:ahyp="http://schemas.microsoft.com/office/drawing/2018/hyperlinkcolor" val="tx"/>
+                    </a:ext>
+                  </a:extLst>
+                </a:hlinkClick>
+              </a:rPr>
+              <a:t>https://dabeastservices.com</a:t>
+            </a:r>
+            <a:endParaRPr sz="5200" i="1" dirty="0">
+              <a:solidFill>
+                <a:srgbClr val="8CD872"/>
+              </a:solidFill>
+              <a:latin typeface="Arial"/>
+              <a:ea typeface="Arial"/>
+              <a:cs typeface="Arial"/>
+              <a:sym typeface="Arial"/>
+            </a:endParaRPr>
+          </a:p>
+        </p:txBody>
+      </p:sp>
+      <p:sp>
+        <p:nvSpPr>
+          <p:cNvPr id="5" name="Google Shape;96;p13">
+            <a:extLst>
+              <a:ext uri="{FF2B5EF4-FFF2-40B4-BE49-F238E27FC236}">
+                <a16:creationId xmlns:a16="http://schemas.microsoft.com/office/drawing/2014/main" id="{8F4EE77F-4802-AA8E-9A9F-159805946F04}"/>
+              </a:ext>
+            </a:extLst>
+          </p:cNvPr>
+          <p:cNvSpPr txBox="1"/>
+          <p:nvPr/>
+        </p:nvSpPr>
+        <p:spPr>
+          <a:xfrm>
+            <a:off x="884832" y="28771585"/>
+            <a:ext cx="5617567" cy="1763727"/>
+          </a:xfrm>
+          <a:prstGeom prst="rect">
+            <a:avLst/>
+          </a:prstGeom>
+          <a:noFill/>
+          <a:ln>
+            <a:noFill/>
+          </a:ln>
+        </p:spPr>
+        <p:txBody>
+          <a:bodyPr spcFirstLastPara="1" wrap="square" lIns="100775" tIns="50375" rIns="100775" bIns="50375" anchor="t" anchorCtr="0">
+            <a:spAutoFit/>
+          </a:bodyPr>
+          <a:lstStyle/>
+          <a:p>
+            <a:pPr>
+              <a:buSzPts val="4000"/>
+            </a:pPr>
+            <a:r>
+              <a:rPr lang="en-US" sz="3600" i="1" dirty="0">
+                <a:solidFill>
+                  <a:srgbClr val="8CD872"/>
+                </a:solidFill>
+                <a:latin typeface="Arial Narrow"/>
+                <a:sym typeface="Arial Narrow"/>
+              </a:rPr>
+              <a:t>Customer is responsible for any allergen disclosures.</a:t>
+            </a:r>
+          </a:p>
+          <a:p>
+            <a:pPr marL="0" marR="0" lvl="0" indent="0" algn="l" rtl="0">
+              <a:lnSpc>
+                <a:spcPct val="100000"/>
+              </a:lnSpc>
+              <a:spcBef>
+                <a:spcPts val="0"/>
+              </a:spcBef>
+              <a:spcAft>
+                <a:spcPts val="0"/>
+              </a:spcAft>
+              <a:buClr>
+                <a:srgbClr val="000000"/>
+              </a:buClr>
+              <a:buSzPts val="4000"/>
+              <a:buFont typeface="Arial"/>
+              <a:buNone/>
+            </a:pPr>
+            <a:r>
+              <a:rPr lang="en-US" sz="3600" i="1" dirty="0">
+                <a:solidFill>
+                  <a:srgbClr val="8CD872"/>
+                </a:solidFill>
+                <a:latin typeface="Arial Narrow"/>
+                <a:sym typeface="Arial Narrow"/>
+              </a:rPr>
+              <a:t>Listed prices are the cash price.</a:t>
+            </a:r>
+            <a:endParaRPr lang="en-US" sz="3600" i="1" u="none" strike="noStrike" cap="none" dirty="0">
+              <a:solidFill>
+                <a:srgbClr val="8CD872"/>
+              </a:solidFill>
+              <a:latin typeface="Arial Narrow"/>
+              <a:ea typeface="Arial"/>
+              <a:cs typeface="Arial"/>
+              <a:sym typeface="Arial Narrow"/>
+            </a:endParaRPr>
+          </a:p>
+        </p:txBody>
+      </p:sp>
     </p:spTree>
   </p:cSld>
   <p:clrMapOvr>
